--- a/Denver/Common-Altitude-2027/decks/05-Civic-and-Community.pptx
+++ b/Denver/Common-Altitude-2027/decks/05-Civic-and-Community.pptx
@@ -537,7 +537,7 @@
           <a:p/>
           <a:p>
             <a:r>
-              <a:t>Status: working proposal; site/date/partners/funding/capacities unconfirmed. No external action is authorized by the deck.</a:t>
+              <a:t>Status: working proposal. Site, dates, partners, funding and capacity need confirmation. The deck grants no external-action authority.</a:t>
             </a:r>
           </a:p>
           <a:p>
@@ -627,13 +627,13 @@
           </a:p>
           <a:p>
             <a:r>
-              <a:t>What we want to learn.</a:t>
+              <a:t>Agency and community questions</a:t>
             </a:r>
           </a:p>
           <a:p/>
           <a:p>
             <a:r>
-              <a:t>This is a coordination discussion, not a submitted application.</a:t>
+              <a:t>The project seeks guidance on the process. It has submitted no application.</a:t>
             </a:r>
           </a:p>
           <a:p/>
@@ -655,7 +655,7 @@
           <a:p/>
           <a:p>
             <a:r>
-              <a:t>Status: working proposal; site/date/partners/funding/capacities unconfirmed. No external action is authorized by the deck.</a:t>
+              <a:t>Status: working proposal. Site, dates, partners, funding and capacity need confirmation. The deck grants no external-action authority.</a:t>
             </a:r>
           </a:p>
           <a:p>
@@ -745,13 +745,13 @@
           </a:p>
           <a:p>
             <a:r>
-              <a:t>Help define a responsible path.</a:t>
+              <a:t>Coordination and evidence needs</a:t>
             </a:r>
           </a:p>
           <a:p/>
           <a:p>
             <a:r>
-              <a:t>If appropriate, identify the correct coordination route and evidence needed before the concept proceeds.</a:t>
+              <a:t>Identify the responsible agencies and the evidence they need before the project proceeds.</a:t>
             </a:r>
           </a:p>
           <a:p/>
@@ -773,7 +773,7 @@
           <a:p/>
           <a:p>
             <a:r>
-              <a:t>Status: working proposal; site/date/partners/funding/capacities unconfirmed. No external action is authorized by the deck.</a:t>
+              <a:t>Status: working proposal. Site, dates, partners, funding and capacity need confirmation. The deck grants no external-action authority.</a:t>
             </a:r>
           </a:p>
           <a:p>
@@ -863,19 +863,19 @@
           </a:p>
           <a:p>
             <a:r>
-              <a:t>Current evidence and unresolved conditions.</a:t>
+              <a:t>Sources and unresolved conditions</a:t>
             </a:r>
           </a:p>
           <a:p/>
           <a:p>
             <a:r>
-              <a:t>Dated primary guidance and prior venue research are in the repository.</a:t>
+              <a:t>The repository links dated guidance and venue research.</a:t>
             </a:r>
           </a:p>
           <a:p/>
           <a:p>
             <a:r>
-              <a:t>Denver event/arts-program guidance; ADA/WCAG design references.</a:t>
+              <a:t>Denver event/arts-program guidance. ADA/WCAG design references.</a:t>
             </a:r>
           </a:p>
           <a:p>
@@ -891,7 +891,7 @@
           <a:p/>
           <a:p>
             <a:r>
-              <a:t>Status: working proposal; site/date/partners/funding/capacities unconfirmed. No external action is authorized by the deck.</a:t>
+              <a:t>Status: working proposal. Site, dates, partners, funding and capacity need confirmation. The deck grants no external-action authority.</a:t>
             </a:r>
           </a:p>
           <a:p>
@@ -981,13 +981,13 @@
           </a:p>
           <a:p>
             <a:r>
-              <a:t>More art in people's lives. More income in artists' hands.</a:t>
+              <a:t>Artist pay and free public access</a:t>
             </a:r>
           </a:p>
           <a:p/>
           <a:p>
             <a:r>
-              <a:t>The event must create useful local value, not merely an impressive temporary image.</a:t>
+              <a:t>The proposal budgets creative work and core art access. Measure both outcomes.</a:t>
             </a:r>
           </a:p>
           <a:p/>
@@ -1009,7 +1009,7 @@
           <a:p/>
           <a:p>
             <a:r>
-              <a:t>Status: working proposal; site/date/partners/funding/capacities unconfirmed. No external action is authorized by the deck.</a:t>
+              <a:t>Status: working proposal. Site, dates, partners, funding and capacity need confirmation. The deck grants no external-action authority.</a:t>
             </a:r>
           </a:p>
           <a:p>
@@ -1099,13 +1099,13 @@
           </a:p>
           <a:p>
             <a:r>
-              <a:t>Proposed paid creative contribution.</a:t>
+              <a:t>Proposed creative fees</a:t>
             </a:r>
           </a:p>
           <a:p/>
           <a:p>
             <a:r>
-              <a:t>Illustrative envelopes; no commissions or grants awarded.</a:t>
+              <a:t>The project has awarded no commission or grant.</a:t>
             </a:r>
           </a:p>
           <a:p/>
@@ -1127,7 +1127,7 @@
           <a:p/>
           <a:p>
             <a:r>
-              <a:t>Status: working proposal; site/date/partners/funding/capacities unconfirmed. No external action is authorized by the deck.</a:t>
+              <a:t>Status: working proposal. Site, dates, partners, funding and capacity need confirmation. The deck grants no external-action authority.</a:t>
             </a:r>
           </a:p>
           <a:p>
@@ -1217,13 +1217,13 @@
           </a:p>
           <a:p>
             <a:r>
-              <a:t>A credible public welcome.</a:t>
+              <a:t>Visitor access before and during the fair</a:t>
             </a:r>
           </a:p>
           <a:p/>
           <a:p>
             <a:r>
-              <a:t>Access is operational, not simply a slogan.</a:t>
+              <a:t>Access requires information, usable routes, trained staff and suitable programs.</a:t>
             </a:r>
           </a:p>
           <a:p/>
@@ -1245,7 +1245,7 @@
           <a:p/>
           <a:p>
             <a:r>
-              <a:t>Status: working proposal; site/date/partners/funding/capacities unconfirmed. No external action is authorized by the deck.</a:t>
+              <a:t>Status: working proposal. Site, dates, partners, funding and capacity need confirmation. The deck grants no external-action authority.</a:t>
             </a:r>
           </a:p>
           <a:p>
@@ -1335,13 +1335,13 @@
           </a:p>
           <a:p>
             <a:r>
-              <a:t>Respect the site and the city.</a:t>
+              <a:t>Site approval and neighborhood effects</a:t>
             </a:r>
           </a:p>
           <a:p/>
           <a:p>
             <a:r>
-              <a:t>The proposed property is a construction/tenant environment until evidence shows what can be used.</a:t>
+              <a:t>The property has construction and tenant constraints. Confirm each usable area.</a:t>
             </a:r>
           </a:p>
           <a:p/>
@@ -1363,7 +1363,7 @@
           <a:p/>
           <a:p>
             <a:r>
-              <a:t>Status: working proposal; site/date/partners/funding/capacities unconfirmed. No external action is authorized by the deck.</a:t>
+              <a:t>Status: working proposal. Site, dates, partners, funding and capacity need confirmation. The deck grants no external-action authority.</a:t>
             </a:r>
           </a:p>
           <a:p>
@@ -1453,19 +1453,19 @@
           </a:p>
           <a:p>
             <a:r>
-              <a:t>Local authorship matters.</a:t>
+              <a:t>Local artist and community roles</a:t>
             </a:r>
           </a:p>
           <a:p/>
           <a:p>
             <a:r>
-              <a:t>Institutional names do not create agreement or permission.</a:t>
+              <a:t>Ask communities about the work and pay for accepted contributions.</a:t>
             </a:r>
           </a:p>
           <a:p/>
           <a:p>
             <a:r>
-              <a:t>Paid listening / Community concerns inform the brief before it is fixed.</a:t>
+              <a:t>Paid listening / Ask communities about the brief before finalizing it.</a:t>
             </a:r>
           </a:p>
           <a:p>
@@ -1481,7 +1481,7 @@
           <a:p/>
           <a:p>
             <a:r>
-              <a:t>Status: working proposal; site/date/partners/funding/capacities unconfirmed. No external action is authorized by the deck.</a:t>
+              <a:t>Status: working proposal. Site, dates, partners, funding and capacity need confirmation. The deck grants no external-action authority.</a:t>
             </a:r>
           </a:p>
           <a:p>
@@ -1571,13 +1571,13 @@
           </a:p>
           <a:p>
             <a:r>
-              <a:t>A proposed seven-day program.</a:t>
+              <a:t>Proposed seven-day program</a:t>
             </a:r>
           </a:p>
           <a:p/>
           <a:p>
             <a:r>
-              <a:t>August 9–15, 2027 remains a planning week, not a city-approved date.</a:t>
+              <a:t>The August 9–15, 2027 planning week has no city approval.</a:t>
             </a:r>
           </a:p>
           <a:p/>
@@ -1599,7 +1599,7 @@
           <a:p/>
           <a:p>
             <a:r>
-              <a:t>Status: working proposal; site/date/partners/funding/capacities unconfirmed. No external action is authorized by the deck.</a:t>
+              <a:t>Status: working proposal. Site, dates, partners, funding and capacity need confirmation. The deck grants no external-action authority.</a:t>
             </a:r>
           </a:p>
           <a:p>
@@ -1689,13 +1689,13 @@
           </a:p>
           <a:p>
             <a:r>
-              <a:t>Report results that mean something.</a:t>
+              <a:t>Artist, public and operating results</a:t>
             </a:r>
           </a:p>
           <a:p/>
           <a:p>
             <a:r>
-              <a:t>No unsupported economic-impact multiplier.</a:t>
+              <a:t>Report direct measures with methods. The plan uses no economic-impact multiplier.</a:t>
             </a:r>
           </a:p>
           <a:p/>
@@ -1717,7 +1717,7 @@
           <a:p/>
           <a:p>
             <a:r>
-              <a:t>Status: working proposal; site/date/partners/funding/capacities unconfirmed. No external action is authorized by the deck.</a:t>
+              <a:t>Status: working proposal. Site, dates, partners, funding and capacity need confirmation. The deck grants no external-action authority.</a:t>
             </a:r>
           </a:p>
           <a:p>
@@ -1807,13 +1807,13 @@
           </a:p>
           <a:p>
             <a:r>
-              <a:t>Public grants are not the base case.</a:t>
+              <a:t>Funding and opening conditions</a:t>
             </a:r>
           </a:p>
           <a:p/>
           <a:p>
             <a:r>
-              <a:t>The commercial proposal must stand on a lawful funded structure.</a:t>
+              <a:t>The base income model includes $0 in public grants.</a:t>
             </a:r>
           </a:p>
           <a:p/>
@@ -1835,7 +1835,7 @@
           <a:p/>
           <a:p>
             <a:r>
-              <a:t>Status: working proposal; site/date/partners/funding/capacities unconfirmed. No external action is authorized by the deck.</a:t>
+              <a:t>Status: working proposal. Site, dates, partners, funding and capacity need confirmation. The deck grants no external-action authority.</a:t>
             </a:r>
           </a:p>
           <a:p>
@@ -5721,7 +5721,7 @@
               </a:defRPr>
             </a:pPr>
             <a:r>
-              <a:t>What we want to learn.</a:t>
+              <a:t>Agency and community questions</a:t>
             </a:r>
           </a:p>
         </p:txBody>
@@ -5766,7 +5766,7 @@
               </a:defRPr>
             </a:pPr>
             <a:r>
-              <a:t>This is a coordination discussion, not a submitted application.</a:t>
+              <a:t>The project seeks guidance on the process. It has submitted no application.</a:t>
             </a:r>
           </a:p>
         </p:txBody>
@@ -6676,7 +6676,7 @@
               </a:defRPr>
             </a:pPr>
             <a:r>
-              <a:t>Help define a responsible</a:t>
+              <a:t>Coordination and evidence</a:t>
             </a:r>
           </a:p>
           <a:p>
@@ -6698,7 +6698,7 @@
               </a:defRPr>
             </a:pPr>
             <a:r>
-              <a:t>path.</a:t>
+              <a:t>needs</a:t>
             </a:r>
           </a:p>
         </p:txBody>
@@ -6743,7 +6743,7 @@
               </a:defRPr>
             </a:pPr>
             <a:r>
-              <a:t>If appropriate, identify the correct coordination route and evidence needed</a:t>
+              <a:t>Identify the responsible agencies and the evidence they need before the</a:t>
             </a:r>
           </a:p>
           <a:p>
@@ -6765,7 +6765,7 @@
               </a:defRPr>
             </a:pPr>
             <a:r>
-              <a:t>before the concept proceeds.</a:t>
+              <a:t>project proceeds.</a:t>
             </a:r>
           </a:p>
         </p:txBody>
@@ -7667,29 +7667,7 @@
               </a:defRPr>
             </a:pPr>
             <a:r>
-              <a:t>Current evidence and unresolved</a:t>
-            </a:r>
-          </a:p>
-          <a:p>
-            <a:pPr>
-              <a:lnSpc>
-                <a:spcPct val="108000"/>
-              </a:lnSpc>
-              <a:spcBef>
-                <a:spcPts val="0"/>
-              </a:spcBef>
-              <a:spcAft>
-                <a:spcPts val="0"/>
-              </a:spcAft>
-              <a:defRPr sz="5000" b="1">
-                <a:solidFill>
-                  <a:srgbClr val="151A22"/>
-                </a:solidFill>
-                <a:latin typeface="Arial"/>
-              </a:defRPr>
-            </a:pPr>
-            <a:r>
-              <a:t>conditions.</a:t>
+              <a:t>Sources and unresolved conditions</a:t>
             </a:r>
           </a:p>
         </p:txBody>
@@ -7702,7 +7680,7 @@
         </p:nvSpPr>
         <p:spPr>
           <a:xfrm>
-            <a:off x="914400" y="2585720"/>
+            <a:off x="914400" y="1887220"/>
             <a:ext cx="12618720" cy="1005840"/>
           </a:xfrm>
           <a:prstGeom prst="rect">
@@ -7734,7 +7712,7 @@
               </a:defRPr>
             </a:pPr>
             <a:r>
-              <a:t>Dated primary guidance and prior venue research are in the repository.</a:t>
+              <a:t>The repository links dated guidance and venue research.</a:t>
             </a:r>
           </a:p>
         </p:txBody>
@@ -7747,7 +7725,7 @@
         </p:nvSpPr>
         <p:spPr>
           <a:xfrm>
-            <a:off x="914400" y="3217926"/>
+            <a:off x="914400" y="2880360"/>
             <a:ext cx="68580" cy="457200"/>
           </a:xfrm>
           <a:prstGeom prst="rect">
@@ -7792,8 +7770,8 @@
         </p:nvSpPr>
         <p:spPr>
           <a:xfrm>
-            <a:off x="1234440" y="3190494"/>
-            <a:ext cx="12252960" cy="1265173"/>
+            <a:off x="1234440" y="2852928"/>
+            <a:ext cx="12252960" cy="1377695"/>
           </a:xfrm>
           <a:prstGeom prst="rect">
             <a:avLst/>
@@ -7824,7 +7802,7 @@
               </a:defRPr>
             </a:pPr>
             <a:r>
-              <a:t>Denver event/arts-program guidance; ADA/WCAG design references.</a:t>
+              <a:t>Denver event/arts-program guidance. ADA/WCAG design references.</a:t>
             </a:r>
           </a:p>
         </p:txBody>
@@ -7837,7 +7815,7 @@
         </p:nvSpPr>
         <p:spPr>
           <a:xfrm>
-            <a:off x="914400" y="4601972"/>
+            <a:off x="914400" y="4376928"/>
             <a:ext cx="68580" cy="457200"/>
           </a:xfrm>
           <a:prstGeom prst="rect">
@@ -7882,8 +7860,8 @@
         </p:nvSpPr>
         <p:spPr>
           <a:xfrm>
-            <a:off x="1234440" y="4574540"/>
-            <a:ext cx="12252960" cy="1265173"/>
+            <a:off x="1234440" y="4349496"/>
+            <a:ext cx="12252960" cy="1377695"/>
           </a:xfrm>
           <a:prstGeom prst="rect">
             <a:avLst/>
@@ -7927,7 +7905,7 @@
         </p:nvSpPr>
         <p:spPr>
           <a:xfrm>
-            <a:off x="914400" y="5986018"/>
+            <a:off x="914400" y="5873496"/>
             <a:ext cx="68580" cy="457200"/>
           </a:xfrm>
           <a:prstGeom prst="rect">
@@ -7972,8 +7950,8 @@
         </p:nvSpPr>
         <p:spPr>
           <a:xfrm>
-            <a:off x="1234440" y="5958586"/>
-            <a:ext cx="12252960" cy="1265173"/>
+            <a:off x="1234440" y="5846063"/>
+            <a:ext cx="12252960" cy="1377695"/>
           </a:xfrm>
           <a:prstGeom prst="rect">
             <a:avLst/>
@@ -8298,29 +8276,7 @@
               </a:defRPr>
             </a:pPr>
             <a:r>
-              <a:t>More art in people's lives.</a:t>
-            </a:r>
-          </a:p>
-          <a:p>
-            <a:pPr>
-              <a:lnSpc>
-                <a:spcPct val="108000"/>
-              </a:lnSpc>
-              <a:spcBef>
-                <a:spcPts val="0"/>
-              </a:spcBef>
-              <a:spcAft>
-                <a:spcPts val="0"/>
-              </a:spcAft>
-              <a:defRPr sz="5000" b="1">
-                <a:solidFill>
-                  <a:srgbClr val="151A22"/>
-                </a:solidFill>
-                <a:latin typeface="Arial"/>
-              </a:defRPr>
-            </a:pPr>
-            <a:r>
-              <a:t>More income in artists' hands.</a:t>
+              <a:t>Artist pay and free public access</a:t>
             </a:r>
           </a:p>
         </p:txBody>
@@ -8333,7 +8289,7 @@
         </p:nvSpPr>
         <p:spPr>
           <a:xfrm>
-            <a:off x="914400" y="2585720"/>
+            <a:off x="914400" y="1887220"/>
             <a:ext cx="12618720" cy="1005840"/>
           </a:xfrm>
           <a:prstGeom prst="rect">
@@ -8365,7 +8321,7 @@
               </a:defRPr>
             </a:pPr>
             <a:r>
-              <a:t>The event must create useful local value, not merely an impressive temporary image.</a:t>
+              <a:t>The proposal budgets creative work and core art access. Measure both outcomes.</a:t>
             </a:r>
           </a:p>
         </p:txBody>
@@ -8378,7 +8334,7 @@
         </p:nvSpPr>
         <p:spPr>
           <a:xfrm>
-            <a:off x="914400" y="3217926"/>
+            <a:off x="914400" y="2880360"/>
             <a:ext cx="68580" cy="457200"/>
           </a:xfrm>
           <a:prstGeom prst="rect">
@@ -8421,8 +8377,8 @@
         </p:nvSpPr>
         <p:spPr>
           <a:xfrm>
-            <a:off x="1234440" y="3190494"/>
-            <a:ext cx="12252960" cy="1265173"/>
+            <a:off x="1234440" y="2852928"/>
+            <a:ext cx="12252960" cy="1377695"/>
           </a:xfrm>
           <a:prstGeom prst="rect">
             <a:avLst/>
@@ -8466,7 +8422,7 @@
         </p:nvSpPr>
         <p:spPr>
           <a:xfrm>
-            <a:off x="914400" y="4601972"/>
+            <a:off x="914400" y="4376928"/>
             <a:ext cx="68580" cy="457200"/>
           </a:xfrm>
           <a:prstGeom prst="rect">
@@ -8509,8 +8465,8 @@
         </p:nvSpPr>
         <p:spPr>
           <a:xfrm>
-            <a:off x="1234440" y="4574540"/>
-            <a:ext cx="12252960" cy="1265173"/>
+            <a:off x="1234440" y="4349496"/>
+            <a:ext cx="12252960" cy="1377695"/>
           </a:xfrm>
           <a:prstGeom prst="rect">
             <a:avLst/>
@@ -8554,7 +8510,7 @@
         </p:nvSpPr>
         <p:spPr>
           <a:xfrm>
-            <a:off x="914400" y="5986018"/>
+            <a:off x="914400" y="5873496"/>
             <a:ext cx="68580" cy="457200"/>
           </a:xfrm>
           <a:prstGeom prst="rect">
@@ -8597,8 +8553,8 @@
         </p:nvSpPr>
         <p:spPr>
           <a:xfrm>
-            <a:off x="1234440" y="5958586"/>
-            <a:ext cx="12252960" cy="1265173"/>
+            <a:off x="1234440" y="5846063"/>
+            <a:ext cx="12252960" cy="1377695"/>
           </a:xfrm>
           <a:prstGeom prst="rect">
             <a:avLst/>
@@ -8923,7 +8879,7 @@
               </a:defRPr>
             </a:pPr>
             <a:r>
-              <a:t>Proposed paid creative contribution.</a:t>
+              <a:t>Proposed creative fees</a:t>
             </a:r>
           </a:p>
         </p:txBody>
@@ -8968,7 +8924,7 @@
               </a:defRPr>
             </a:pPr>
             <a:r>
-              <a:t>Illustrative envelopes; no commissions or grants awarded.</a:t>
+              <a:t>The project has awarded no commission or grant.</a:t>
             </a:r>
           </a:p>
         </p:txBody>
@@ -9812,7 +9768,7 @@
               </a:defRPr>
             </a:pPr>
             <a:r>
-              <a:t>A credible public welcome.</a:t>
+              <a:t>Visitor access before and during the fair</a:t>
             </a:r>
           </a:p>
         </p:txBody>
@@ -9857,7 +9813,7 @@
               </a:defRPr>
             </a:pPr>
             <a:r>
-              <a:t>Access is operational, not simply a slogan.</a:t>
+              <a:t>Access requires information, usable routes, trained staff and suitable programs.</a:t>
             </a:r>
           </a:p>
         </p:txBody>
@@ -10789,7 +10745,7 @@
               </a:defRPr>
             </a:pPr>
             <a:r>
-              <a:t>Respect the site and the city.</a:t>
+              <a:t>Site approval and neighborhood effects</a:t>
             </a:r>
           </a:p>
         </p:txBody>
@@ -10834,7 +10790,7 @@
               </a:defRPr>
             </a:pPr>
             <a:r>
-              <a:t>The proposed property is a construction/tenant environment until evidence shows what can be used.</a:t>
+              <a:t>The property has construction and tenant constraints. Confirm each usable area.</a:t>
             </a:r>
           </a:p>
         </p:txBody>
@@ -11766,7 +11722,7 @@
               </a:defRPr>
             </a:pPr>
             <a:r>
-              <a:t>Local authorship matters.</a:t>
+              <a:t>Local artist and community roles</a:t>
             </a:r>
           </a:p>
         </p:txBody>
@@ -11811,7 +11767,7 @@
               </a:defRPr>
             </a:pPr>
             <a:r>
-              <a:t>Institutional names do not create agreement or permission.</a:t>
+              <a:t>Ask communities about the work and pay for accepted contributions.</a:t>
             </a:r>
           </a:p>
         </p:txBody>
@@ -11987,7 +11943,7 @@
               </a:defRPr>
             </a:pPr>
             <a:r>
-              <a:t>Community concerns inform</a:t>
+              <a:t>Ask communities about the</a:t>
             </a:r>
           </a:p>
           <a:p>
@@ -12009,7 +11965,7 @@
               </a:defRPr>
             </a:pPr>
             <a:r>
-              <a:t>the brief before it is fixed.</a:t>
+              <a:t>brief before finalizing it.</a:t>
             </a:r>
           </a:p>
         </p:txBody>
@@ -12721,7 +12677,7 @@
               </a:defRPr>
             </a:pPr>
             <a:r>
-              <a:t>A proposed seven-day program.</a:t>
+              <a:t>Proposed seven-day program</a:t>
             </a:r>
           </a:p>
         </p:txBody>
@@ -12766,7 +12722,7 @@
               </a:defRPr>
             </a:pPr>
             <a:r>
-              <a:t>August 9–15, 2027 remains a planning week, not a city-approved date.</a:t>
+              <a:t>The August 9–15, 2027 planning week has no city approval.</a:t>
             </a:r>
           </a:p>
         </p:txBody>
@@ -13632,7 +13588,7 @@
               </a:defRPr>
             </a:pPr>
             <a:r>
-              <a:t>Report results that mean something.</a:t>
+              <a:t>Artist, public and operating results</a:t>
             </a:r>
           </a:p>
         </p:txBody>
@@ -13677,7 +13633,7 @@
               </a:defRPr>
             </a:pPr>
             <a:r>
-              <a:t>No unsupported economic-impact multiplier.</a:t>
+              <a:t>Report direct measures with methods. The plan uses no economic-impact multiplier.</a:t>
             </a:r>
           </a:p>
         </p:txBody>
@@ -14587,7 +14543,7 @@
               </a:defRPr>
             </a:pPr>
             <a:r>
-              <a:t>Public grants are not the base case.</a:t>
+              <a:t>Funding and opening conditions</a:t>
             </a:r>
           </a:p>
         </p:txBody>
@@ -14632,7 +14588,7 @@
               </a:defRPr>
             </a:pPr>
             <a:r>
-              <a:t>The commercial proposal must stand on a lawful funded structure.</a:t>
+              <a:t>The base income model includes $0 in public grants.</a:t>
             </a:r>
           </a:p>
         </p:txBody>
